--- a/20261006_サンクスLINE誘導のご提案_業界別ver2.0.pptx
+++ b/20261006_サンクスLINE誘導のご提案_業界別ver2.0.pptx
@@ -6,17 +6,17 @@
     <p:sldMasterId id="2147483687" r:id="rId2"/>
   </p:sldMasterIdLst>
   <p:notesMasterIdLst>
-    <p:notesMasterId r:id="rId7"/>
+    <p:notesMasterId r:id="rId8"/>
   </p:notesMasterIdLst>
   <p:handoutMasterIdLst>
-    <p:handoutMasterId r:id="rId8"/>
+    <p:handoutMasterId r:id="rId9"/>
   </p:handoutMasterIdLst>
   <p:sldIdLst>
-    <p:sldId id="3043" r:id="rId13"/>
-    <p:sldId id="3044" r:id="rId14"/>
-    <p:sldId id="3039" r:id="rId3"/>
-    <p:sldId id="3041" r:id="rId5"/>
-    <p:sldId id="3042" r:id="rId6"/>
+    <p:sldId id="3043" r:id="rId3"/>
+    <p:sldId id="3044" r:id="rId4"/>
+    <p:sldId id="3039" r:id="rId5"/>
+    <p:sldId id="3041" r:id="rId6"/>
+    <p:sldId id="3042" r:id="rId7"/>
   </p:sldIdLst>
   <p:sldSz cx="12192000" cy="6858000"/>
   <p:notesSz cx="6807200" cy="9939338"/>
@@ -2644,7 +2644,7 @@
 </file>
 
 <file path=ppt/slides/slide1.xml><?xml version="1.0" encoding="utf-8"?>
-<p:sld xmlns:a="http://schemas.openxmlformats.org/drawingml/2006/main" xmlns:p="http://schemas.openxmlformats.org/presentationml/2006/main" xmlns:r="http://schemas.openxmlformats.org/officeDocument/2006/relationships">
+<p:sld xmlns:a="http://schemas.openxmlformats.org/drawingml/2006/main" xmlns:r="http://schemas.openxmlformats.org/officeDocument/2006/relationships" xmlns:p="http://schemas.openxmlformats.org/presentationml/2006/main">
   <p:cSld>
     <p:spTree>
       <p:nvGrpSpPr>
@@ -2652,7 +2652,14 @@
         <p:cNvGrpSpPr/>
         <p:nvPr/>
       </p:nvGrpSpPr>
-      <p:grpSpPr/>
+      <p:grpSpPr>
+        <a:xfrm>
+          <a:off x="0" y="0"/>
+          <a:ext cx="0" cy="0"/>
+          <a:chOff x="0" y="0"/>
+          <a:chExt cx="0" cy="0"/>
+        </a:xfrm>
+      </p:grpSpPr>
       <p:sp>
         <p:nvSpPr>
           <p:cNvPr id="3" name="TextBox 1"/>
@@ -2813,10 +2820,11 @@
           </a:fontRef>
         </p:style>
         <p:txBody>
-          <a:bodyPr rtlCol="0" anchor="ctr" wrap="square" lIns="72000" tIns="18000" rIns="72000" bIns="18000"/>
+          <a:bodyPr wrap="square" lIns="72000" tIns="18000" rIns="72000" bIns="18000" rtlCol="0" anchor="ctr"/>
           <a:lstStyle/>
           <a:p>
             <a:pPr algn="ctr"/>
+            <a:endParaRPr/>
           </a:p>
         </p:txBody>
       </p:sp>
@@ -2837,7 +2845,7 @@
           <a:noFill/>
         </p:spPr>
         <p:txBody>
-          <a:bodyPr wrap="square" anchor="ctr" lIns="36000" rIns="36000" tIns="18000" bIns="18000">
+          <a:bodyPr wrap="square" lIns="36000" tIns="18000" rIns="36000" bIns="18000" anchor="ctr">
             <a:spAutoFit/>
           </a:bodyPr>
           <a:lstStyle/>
@@ -2903,10 +2911,11 @@
           </a:fontRef>
         </p:style>
         <p:txBody>
-          <a:bodyPr rtlCol="0" anchor="ctr" wrap="square" lIns="72000" tIns="18000" rIns="72000" bIns="18000"/>
+          <a:bodyPr wrap="square" lIns="72000" tIns="18000" rIns="72000" bIns="18000" rtlCol="0" anchor="ctr"/>
           <a:lstStyle/>
           <a:p>
             <a:pPr algn="ctr"/>
+            <a:endParaRPr/>
           </a:p>
         </p:txBody>
       </p:sp>
@@ -2927,7 +2936,7 @@
           <a:noFill/>
         </p:spPr>
         <p:txBody>
-          <a:bodyPr wrap="square" anchor="ctr" lIns="36000" rIns="36000" tIns="18000" bIns="18000">
+          <a:bodyPr wrap="square" lIns="36000" tIns="18000" rIns="36000" bIns="18000" anchor="ctr">
             <a:spAutoFit/>
           </a:bodyPr>
           <a:lstStyle/>
@@ -2993,10 +3002,11 @@
           </a:fontRef>
         </p:style>
         <p:txBody>
-          <a:bodyPr rtlCol="0" anchor="ctr" wrap="square" lIns="72000" tIns="18000" rIns="72000" bIns="18000"/>
+          <a:bodyPr wrap="square" lIns="72000" tIns="18000" rIns="72000" bIns="18000" rtlCol="0" anchor="ctr"/>
           <a:lstStyle/>
           <a:p>
             <a:pPr algn="ctr"/>
+            <a:endParaRPr/>
           </a:p>
         </p:txBody>
       </p:sp>
@@ -3017,7 +3027,7 @@
           <a:noFill/>
         </p:spPr>
         <p:txBody>
-          <a:bodyPr wrap="square" anchor="ctr" lIns="36000" rIns="36000" tIns="18000" bIns="18000">
+          <a:bodyPr wrap="square" lIns="36000" tIns="18000" rIns="36000" bIns="18000" anchor="ctr">
             <a:spAutoFit/>
           </a:bodyPr>
           <a:lstStyle/>
@@ -3083,10 +3093,11 @@
           </a:fontRef>
         </p:style>
         <p:txBody>
-          <a:bodyPr rtlCol="0" anchor="ctr" wrap="square" lIns="72000" tIns="18000" rIns="72000" bIns="18000"/>
+          <a:bodyPr wrap="square" lIns="72000" tIns="18000" rIns="72000" bIns="18000" rtlCol="0" anchor="ctr"/>
           <a:lstStyle/>
           <a:p>
             <a:pPr algn="ctr"/>
+            <a:endParaRPr/>
           </a:p>
         </p:txBody>
       </p:sp>
@@ -3107,7 +3118,7 @@
           <a:noFill/>
         </p:spPr>
         <p:txBody>
-          <a:bodyPr wrap="square" anchor="ctr" lIns="36000" rIns="36000" tIns="18000" bIns="18000">
+          <a:bodyPr wrap="square" lIns="36000" tIns="18000" rIns="36000" bIns="18000" anchor="ctr">
             <a:spAutoFit/>
           </a:bodyPr>
           <a:lstStyle/>
@@ -3194,10 +3205,11 @@
           </a:fontRef>
         </p:style>
         <p:txBody>
-          <a:bodyPr rtlCol="0" anchor="ctr" wrap="square" lIns="72000" tIns="18000" rIns="72000" bIns="18000"/>
+          <a:bodyPr wrap="square" lIns="72000" tIns="18000" rIns="72000" bIns="18000" rtlCol="0" anchor="ctr"/>
           <a:lstStyle/>
           <a:p>
             <a:pPr algn="ctr"/>
+            <a:endParaRPr/>
           </a:p>
         </p:txBody>
       </p:sp>
@@ -3218,7 +3230,7 @@
           <a:noFill/>
         </p:spPr>
         <p:txBody>
-          <a:bodyPr wrap="square" anchor="ctr" lIns="36000" rIns="36000" tIns="18000" bIns="18000">
+          <a:bodyPr wrap="square" lIns="36000" tIns="18000" rIns="36000" bIns="18000" anchor="ctr">
             <a:spAutoFit/>
           </a:bodyPr>
           <a:lstStyle/>
@@ -3305,10 +3317,11 @@
           </a:fontRef>
         </p:style>
         <p:txBody>
-          <a:bodyPr rtlCol="0" anchor="ctr" wrap="square" lIns="72000" tIns="18000" rIns="72000" bIns="18000"/>
+          <a:bodyPr wrap="square" lIns="72000" tIns="18000" rIns="72000" bIns="18000" rtlCol="0" anchor="ctr"/>
           <a:lstStyle/>
           <a:p>
             <a:pPr algn="ctr"/>
+            <a:endParaRPr/>
           </a:p>
         </p:txBody>
       </p:sp>
@@ -3329,7 +3342,7 @@
           <a:noFill/>
         </p:spPr>
         <p:txBody>
-          <a:bodyPr wrap="square" anchor="ctr" lIns="36000" rIns="36000" tIns="18000" bIns="18000">
+          <a:bodyPr wrap="square" lIns="36000" tIns="18000" rIns="36000" bIns="18000" anchor="ctr">
             <a:spAutoFit/>
           </a:bodyPr>
           <a:lstStyle/>
@@ -3416,10 +3429,11 @@
           </a:fontRef>
         </p:style>
         <p:txBody>
-          <a:bodyPr rtlCol="0" anchor="ctr" wrap="square" lIns="72000" tIns="18000" rIns="72000" bIns="18000"/>
+          <a:bodyPr wrap="square" lIns="72000" tIns="18000" rIns="72000" bIns="18000" rtlCol="0" anchor="ctr"/>
           <a:lstStyle/>
           <a:p>
             <a:pPr algn="ctr"/>
+            <a:endParaRPr/>
           </a:p>
         </p:txBody>
       </p:sp>
@@ -3431,8 +3445,8 @@
         </p:nvSpPr>
         <p:spPr>
           <a:xfrm>
-            <a:off x="8808772" y="2268000"/>
-            <a:ext cx="1049613" cy="972000"/>
+            <a:off x="8808772" y="2524228"/>
+            <a:ext cx="1049613" cy="459544"/>
           </a:xfrm>
           <a:prstGeom prst="rect">
             <a:avLst/>
@@ -3440,7 +3454,7 @@
           <a:noFill/>
         </p:spPr>
         <p:txBody>
-          <a:bodyPr wrap="square" anchor="ctr" lIns="36000" rIns="36000" tIns="18000" bIns="18000">
+          <a:bodyPr wrap="square" lIns="36000" tIns="18000" rIns="36000" bIns="18000" anchor="ctr">
             <a:spAutoFit/>
           </a:bodyPr>
           <a:lstStyle/>
@@ -3454,7 +3468,7 @@
               </a:spcAft>
             </a:pPr>
             <a:r>
-              <a:rPr sz="1250" b="1">
+              <a:rPr lang="ja-JP" altLang="en-US" sz="1250" b="1" dirty="0">
                 <a:solidFill>
                   <a:srgbClr val="1F285A"/>
                 </a:solidFill>
@@ -3462,8 +3476,27 @@
                 <a:ea typeface="メイリオ"/>
                 <a:cs typeface="メイリオ"/>
               </a:rPr>
-              <a:t>本CV・売上</a:t>
-            </a:r>
+              <a:t>売上につながる</a:t>
+            </a:r>
+            <a:r>
+              <a:rPr lang="en-US" altLang="ja-JP" sz="1250" b="1" dirty="0">
+                <a:solidFill>
+                  <a:srgbClr val="1F285A"/>
+                </a:solidFill>
+                <a:latin typeface="メイリオ"/>
+                <a:ea typeface="メイリオ"/>
+                <a:cs typeface="メイリオ"/>
+              </a:rPr>
+              <a:t>CV</a:t>
+            </a:r>
+            <a:endParaRPr sz="1250" b="1" dirty="0">
+              <a:solidFill>
+                <a:srgbClr val="1F285A"/>
+              </a:solidFill>
+              <a:latin typeface="メイリオ"/>
+              <a:ea typeface="メイリオ"/>
+              <a:cs typeface="メイリオ"/>
+            </a:endParaRPr>
           </a:p>
         </p:txBody>
       </p:sp>
@@ -3506,10 +3539,11 @@
           </a:fontRef>
         </p:style>
         <p:txBody>
-          <a:bodyPr rtlCol="0" anchor="ctr" wrap="square" lIns="72000" tIns="18000" rIns="72000" bIns="18000"/>
+          <a:bodyPr wrap="square" lIns="72000" tIns="18000" rIns="72000" bIns="18000" rtlCol="0" anchor="ctr"/>
           <a:lstStyle/>
           <a:p>
             <a:pPr algn="ctr"/>
+            <a:endParaRPr/>
           </a:p>
         </p:txBody>
       </p:sp>
@@ -3530,7 +3564,7 @@
           <a:noFill/>
         </p:spPr>
         <p:txBody>
-          <a:bodyPr wrap="square" anchor="ctr" lIns="36000" rIns="36000" tIns="18000" bIns="18000">
+          <a:bodyPr wrap="square" lIns="36000" tIns="18000" rIns="36000" bIns="18000" anchor="ctr">
             <a:spAutoFit/>
           </a:bodyPr>
           <a:lstStyle/>
@@ -3594,10 +3628,11 @@
           </a:fontRef>
         </p:style>
         <p:txBody>
-          <a:bodyPr rtlCol="0" anchor="ctr" wrap="square" lIns="72000" tIns="18000" rIns="72000" bIns="18000"/>
+          <a:bodyPr wrap="square" lIns="72000" tIns="18000" rIns="72000" bIns="18000" rtlCol="0" anchor="ctr"/>
           <a:lstStyle/>
           <a:p>
             <a:pPr algn="ctr"/>
+            <a:endParaRPr/>
           </a:p>
         </p:txBody>
       </p:sp>
@@ -3618,7 +3653,7 @@
           <a:noFill/>
         </p:spPr>
         <p:txBody>
-          <a:bodyPr wrap="square" anchor="ctr" lIns="36000" rIns="36000" tIns="18000" bIns="18000">
+          <a:bodyPr wrap="square" lIns="36000" tIns="18000" rIns="36000" bIns="18000" anchor="ctr">
             <a:spAutoFit/>
           </a:bodyPr>
           <a:lstStyle/>
@@ -3682,10 +3717,11 @@
           </a:fontRef>
         </p:style>
         <p:txBody>
-          <a:bodyPr rtlCol="0" anchor="ctr" wrap="square" lIns="72000" tIns="18000" rIns="72000" bIns="18000"/>
+          <a:bodyPr wrap="square" lIns="72000" tIns="18000" rIns="72000" bIns="18000" rtlCol="0" anchor="ctr"/>
           <a:lstStyle/>
           <a:p>
             <a:pPr algn="ctr"/>
+            <a:endParaRPr/>
           </a:p>
         </p:txBody>
       </p:sp>
@@ -3706,7 +3742,7 @@
           <a:noFill/>
         </p:spPr>
         <p:txBody>
-          <a:bodyPr wrap="square" anchor="ctr" lIns="36000" rIns="36000" tIns="18000" bIns="18000">
+          <a:bodyPr wrap="square" lIns="36000" tIns="18000" rIns="36000" bIns="18000" anchor="ctr">
             <a:spAutoFit/>
           </a:bodyPr>
           <a:lstStyle/>
@@ -3786,7 +3822,7 @@
           <a:noFill/>
         </p:spPr>
         <p:txBody>
-          <a:bodyPr wrap="square" anchor="t" lIns="36000" rIns="36000" tIns="18000" bIns="18000">
+          <a:bodyPr wrap="square" lIns="36000" tIns="18000" rIns="36000" bIns="18000" anchor="t">
             <a:spAutoFit/>
           </a:bodyPr>
           <a:lstStyle/>
@@ -3872,7 +3908,7 @@
           <a:noFill/>
         </p:spPr>
         <p:txBody>
-          <a:bodyPr wrap="square" anchor="t" lIns="36000" rIns="36000" tIns="18000" bIns="18000">
+          <a:bodyPr wrap="square" lIns="36000" tIns="18000" rIns="36000" bIns="18000" anchor="t">
             <a:spAutoFit/>
           </a:bodyPr>
           <a:lstStyle/>
@@ -3979,7 +4015,7 @@
           <a:noFill/>
         </p:spPr>
         <p:txBody>
-          <a:bodyPr wrap="square" anchor="t" lIns="36000" rIns="36000" tIns="18000" bIns="18000">
+          <a:bodyPr wrap="square" lIns="36000" tIns="18000" rIns="36000" bIns="18000" anchor="t">
             <a:spAutoFit/>
           </a:bodyPr>
           <a:lstStyle/>
@@ -4086,7 +4122,7 @@
           <a:noFill/>
         </p:spPr>
         <p:txBody>
-          <a:bodyPr wrap="square" anchor="t" lIns="36000" rIns="36000" tIns="18000" bIns="18000">
+          <a:bodyPr wrap="square" lIns="36000" tIns="18000" rIns="36000" bIns="18000" anchor="t">
             <a:spAutoFit/>
           </a:bodyPr>
           <a:lstStyle/>
@@ -4184,8 +4220,8 @@
         </p:nvSpPr>
         <p:spPr>
           <a:xfrm>
-            <a:off x="792000" y="5508000"/>
-            <a:ext cx="10620000" cy="468000"/>
+            <a:off x="792000" y="5579938"/>
+            <a:ext cx="10620000" cy="324123"/>
           </a:xfrm>
           <a:prstGeom prst="rect">
             <a:avLst/>
@@ -4193,7 +4229,7 @@
           <a:noFill/>
         </p:spPr>
         <p:txBody>
-          <a:bodyPr wrap="square" anchor="ctr" lIns="36000" rIns="36000" tIns="18000" bIns="18000">
+          <a:bodyPr wrap="square" lIns="36000" tIns="18000" rIns="36000" bIns="18000" anchor="ctr">
             <a:spAutoFit/>
           </a:bodyPr>
           <a:lstStyle/>
@@ -4207,7 +4243,7 @@
               </a:spcAft>
             </a:pPr>
             <a:r>
-              <a:rPr sz="1700" b="1">
+              <a:rPr sz="1700" b="1" dirty="0" err="1">
                 <a:solidFill>
                   <a:srgbClr val="1F285A"/>
                 </a:solidFill>
@@ -4215,8 +4251,38 @@
                 <a:ea typeface="メイリオ"/>
                 <a:cs typeface="メイリオ"/>
               </a:rPr>
-              <a:t>CVをゴールにせず、広告で獲得したユーザーをLINEで育成し、その後の売上までつなげる</a:t>
-            </a:r>
+              <a:t>CVをゴールにせず、広告で獲得したユーザーをLINEで育成し、その後の売上</a:t>
+            </a:r>
+            <a:r>
+              <a:rPr lang="ja-JP" altLang="en-US" sz="1700" b="1" dirty="0">
+                <a:solidFill>
+                  <a:srgbClr val="1F285A"/>
+                </a:solidFill>
+                <a:latin typeface="メイリオ"/>
+                <a:ea typeface="メイリオ"/>
+                <a:cs typeface="メイリオ"/>
+              </a:rPr>
+              <a:t>に</a:t>
+            </a:r>
+            <a:r>
+              <a:rPr sz="1700" b="1" dirty="0" err="1">
+                <a:solidFill>
+                  <a:srgbClr val="1F285A"/>
+                </a:solidFill>
+                <a:latin typeface="メイリオ"/>
+                <a:ea typeface="メイリオ"/>
+                <a:cs typeface="メイリオ"/>
+              </a:rPr>
+              <a:t>つなげる</a:t>
+            </a:r>
+            <a:endParaRPr sz="1700" b="1" dirty="0">
+              <a:solidFill>
+                <a:srgbClr val="1F285A"/>
+              </a:solidFill>
+              <a:latin typeface="メイリオ"/>
+              <a:ea typeface="メイリオ"/>
+              <a:cs typeface="メイリオ"/>
+            </a:endParaRPr>
           </a:p>
         </p:txBody>
       </p:sp>
@@ -4229,7 +4295,7 @@
 </file>
 
 <file path=ppt/slides/slide2.xml><?xml version="1.0" encoding="utf-8"?>
-<p:sld xmlns:a="http://schemas.openxmlformats.org/drawingml/2006/main" xmlns:p="http://schemas.openxmlformats.org/presentationml/2006/main" xmlns:r="http://schemas.openxmlformats.org/officeDocument/2006/relationships">
+<p:sld xmlns:a="http://schemas.openxmlformats.org/drawingml/2006/main" xmlns:r="http://schemas.openxmlformats.org/officeDocument/2006/relationships" xmlns:p="http://schemas.openxmlformats.org/presentationml/2006/main">
   <p:cSld>
     <p:spTree>
       <p:nvGrpSpPr>
@@ -4237,7 +4303,14 @@
         <p:cNvGrpSpPr/>
         <p:nvPr/>
       </p:nvGrpSpPr>
-      <p:grpSpPr/>
+      <p:grpSpPr>
+        <a:xfrm>
+          <a:off x="0" y="0"/>
+          <a:ext cx="0" cy="0"/>
+          <a:chOff x="0" y="0"/>
+          <a:chExt cx="0" cy="0"/>
+        </a:xfrm>
+      </p:grpSpPr>
       <p:sp>
         <p:nvSpPr>
           <p:cNvPr id="3" name="TextBox 1"/>
@@ -4246,8 +4319,8 @@
         </p:nvSpPr>
         <p:spPr>
           <a:xfrm>
-            <a:off x="547200" y="136800"/>
-            <a:ext cx="11070119" cy="338400"/>
+            <a:off x="547200" y="161078"/>
+            <a:ext cx="11070119" cy="289843"/>
           </a:xfrm>
           <a:prstGeom prst="rect">
             <a:avLst/>
@@ -4262,7 +4335,7 @@
           <a:p>
             <a:pPr algn="l"/>
             <a:r>
-              <a:rPr sz="1600" b="1">
+              <a:rPr lang="ja-JP" altLang="en-US" sz="1600" b="1" dirty="0">
                 <a:solidFill>
                   <a:srgbClr val="002060"/>
                 </a:solidFill>
@@ -4270,8 +4343,71 @@
                 <a:ea typeface="メイリオ"/>
                 <a:cs typeface="メイリオ"/>
               </a:rPr>
-              <a:t>軽いCVからLINEにつなぎ、本CVまで引き上げる</a:t>
-            </a:r>
+              <a:t>ハードルの低い</a:t>
+            </a:r>
+            <a:r>
+              <a:rPr sz="1600" b="1" dirty="0" err="1">
+                <a:solidFill>
+                  <a:srgbClr val="002060"/>
+                </a:solidFill>
+                <a:latin typeface="メイリオ"/>
+                <a:ea typeface="メイリオ"/>
+                <a:cs typeface="メイリオ"/>
+              </a:rPr>
+              <a:t>CVからLINEにつなぎ</a:t>
+            </a:r>
+            <a:r>
+              <a:rPr sz="1600" b="1" dirty="0">
+                <a:solidFill>
+                  <a:srgbClr val="002060"/>
+                </a:solidFill>
+                <a:latin typeface="メイリオ"/>
+                <a:ea typeface="メイリオ"/>
+                <a:cs typeface="メイリオ"/>
+              </a:rPr>
+              <a:t>、</a:t>
+            </a:r>
+            <a:r>
+              <a:rPr lang="ja-JP" altLang="en-US" sz="1600" b="1" dirty="0">
+                <a:solidFill>
+                  <a:srgbClr val="002060"/>
+                </a:solidFill>
+                <a:latin typeface="メイリオ"/>
+                <a:ea typeface="メイリオ"/>
+                <a:cs typeface="メイリオ"/>
+              </a:rPr>
+              <a:t>売上・</a:t>
+            </a:r>
+            <a:r>
+              <a:rPr lang="en-US" altLang="ja-JP" sz="1600" b="1" dirty="0">
+                <a:solidFill>
+                  <a:srgbClr val="002060"/>
+                </a:solidFill>
+                <a:latin typeface="メイリオ"/>
+                <a:ea typeface="メイリオ"/>
+                <a:cs typeface="メイリオ"/>
+              </a:rPr>
+              <a:t>LTV</a:t>
+            </a:r>
+            <a:r>
+              <a:rPr lang="ja-JP" altLang="en-US" sz="1600" b="1" dirty="0">
+                <a:solidFill>
+                  <a:srgbClr val="002060"/>
+                </a:solidFill>
+                <a:latin typeface="メイリオ"/>
+                <a:ea typeface="メイリオ"/>
+                <a:cs typeface="メイリオ"/>
+              </a:rPr>
+              <a:t>最大化へ</a:t>
+            </a:r>
+            <a:endParaRPr sz="1600" b="1" dirty="0">
+              <a:solidFill>
+                <a:srgbClr val="002060"/>
+              </a:solidFill>
+              <a:latin typeface="メイリオ"/>
+              <a:ea typeface="メイリオ"/>
+              <a:cs typeface="メイリオ"/>
+            </a:endParaRPr>
           </a:p>
         </p:txBody>
       </p:sp>
@@ -4283,8 +4419,8 @@
         </p:nvSpPr>
         <p:spPr>
           <a:xfrm>
-            <a:off x="793680" y="725334"/>
-            <a:ext cx="11214119" cy="529332"/>
+            <a:off x="793680" y="798527"/>
+            <a:ext cx="11214119" cy="382946"/>
           </a:xfrm>
           <a:prstGeom prst="rect">
             <a:avLst/>
@@ -4303,7 +4439,7 @@
               </a:lnSpc>
             </a:pPr>
             <a:r>
-              <a:rPr sz="1800" dirty="0" err="1">
+              <a:rPr lang="en-US" altLang="ja-JP" sz="1800" dirty="0">
                 <a:solidFill>
                   <a:srgbClr val="333333"/>
                 </a:solidFill>
@@ -4311,7 +4447,40 @@
                 <a:ea typeface="メイリオ"/>
                 <a:cs typeface="メイリオ"/>
               </a:rPr>
-              <a:t>サンクスLINE誘導＝CV完了画面から、LINE友だち追加へ案内する仕組み</a:t>
+              <a:t>CV</a:t>
+            </a:r>
+            <a:r>
+              <a:rPr lang="ja-JP" altLang="en-US" sz="1800" dirty="0">
+                <a:solidFill>
+                  <a:srgbClr val="333333"/>
+                </a:solidFill>
+                <a:latin typeface="メイリオ"/>
+                <a:ea typeface="メイリオ"/>
+                <a:cs typeface="メイリオ"/>
+              </a:rPr>
+              <a:t>完了画面から</a:t>
+            </a:r>
+            <a:r>
+              <a:rPr lang="en-US" altLang="ja-JP" sz="1800" dirty="0">
+                <a:solidFill>
+                  <a:srgbClr val="333333"/>
+                </a:solidFill>
+                <a:latin typeface="メイリオ"/>
+                <a:ea typeface="メイリオ"/>
+                <a:cs typeface="メイリオ"/>
+              </a:rPr>
+              <a:t>LINE</a:t>
+            </a:r>
+            <a:r>
+              <a:rPr lang="ja-JP" altLang="en-US" sz="1800" dirty="0">
+                <a:solidFill>
+                  <a:srgbClr val="333333"/>
+                </a:solidFill>
+                <a:latin typeface="メイリオ"/>
+                <a:ea typeface="メイリオ"/>
+                <a:cs typeface="メイリオ"/>
+              </a:rPr>
+              <a:t>の友だち追加へ誘導する仕組み</a:t>
             </a:r>
             <a:endParaRPr sz="1250" dirty="0">
               <a:solidFill>
@@ -4398,10 +4567,11 @@
           </a:fontRef>
         </p:style>
         <p:txBody>
-          <a:bodyPr rtlCol="0" anchor="ctr" wrap="square" lIns="72000" tIns="18000" rIns="72000" bIns="18000"/>
+          <a:bodyPr wrap="square" lIns="72000" tIns="18000" rIns="72000" bIns="18000" rtlCol="0" anchor="ctr"/>
           <a:lstStyle/>
           <a:p>
             <a:pPr algn="ctr"/>
+            <a:endParaRPr/>
           </a:p>
         </p:txBody>
       </p:sp>
@@ -4422,7 +4592,7 @@
           <a:noFill/>
         </p:spPr>
         <p:txBody>
-          <a:bodyPr wrap="square" anchor="ctr" lIns="36000" rIns="36000" tIns="18000" bIns="18000">
+          <a:bodyPr wrap="square" lIns="36000" tIns="18000" rIns="36000" bIns="18000" anchor="ctr">
             <a:spAutoFit/>
           </a:bodyPr>
           <a:lstStyle/>
@@ -4488,10 +4658,11 @@
           </a:fontRef>
         </p:style>
         <p:txBody>
-          <a:bodyPr rtlCol="0" anchor="ctr" wrap="square" lIns="72000" tIns="18000" rIns="72000" bIns="18000"/>
+          <a:bodyPr wrap="square" lIns="72000" tIns="18000" rIns="72000" bIns="18000" rtlCol="0" anchor="ctr"/>
           <a:lstStyle/>
           <a:p>
             <a:pPr algn="ctr"/>
+            <a:endParaRPr/>
           </a:p>
         </p:txBody>
       </p:sp>
@@ -4503,8 +4674,8 @@
         </p:nvSpPr>
         <p:spPr>
           <a:xfrm>
-            <a:off x="2394140" y="2124000"/>
-            <a:ext cx="1941046" cy="1224000"/>
+            <a:off x="2394140" y="2463908"/>
+            <a:ext cx="1941046" cy="544183"/>
           </a:xfrm>
           <a:prstGeom prst="rect">
             <a:avLst/>
@@ -4512,7 +4683,7 @@
           <a:noFill/>
         </p:spPr>
         <p:txBody>
-          <a:bodyPr wrap="square" anchor="ctr" lIns="36000" rIns="36000" tIns="18000" bIns="18000">
+          <a:bodyPr wrap="square" lIns="36000" tIns="18000" rIns="36000" bIns="18000" anchor="ctr">
             <a:spAutoFit/>
           </a:bodyPr>
           <a:lstStyle/>
@@ -4526,7 +4697,7 @@
               </a:spcAft>
             </a:pPr>
             <a:r>
-              <a:rPr sz="1500" b="1">
+              <a:rPr sz="1500" b="1" dirty="0" err="1">
                 <a:solidFill>
                   <a:srgbClr val="FFFFFF"/>
                 </a:solidFill>
@@ -4536,6 +4707,14 @@
               </a:rPr>
               <a:t>簡易診断などの</a:t>
             </a:r>
+            <a:endParaRPr sz="1500" b="1" dirty="0">
+              <a:solidFill>
+                <a:srgbClr val="FFFFFF"/>
+              </a:solidFill>
+              <a:latin typeface="メイリオ"/>
+              <a:ea typeface="メイリオ"/>
+              <a:cs typeface="メイリオ"/>
+            </a:endParaRPr>
           </a:p>
           <a:p>
             <a:pPr algn="ctr">
@@ -4547,7 +4726,7 @@
               </a:spcAft>
             </a:pPr>
             <a:r>
-              <a:rPr sz="1500" b="1">
+              <a:rPr lang="ja-JP" altLang="en-US" sz="1500" b="1" dirty="0">
                 <a:solidFill>
                   <a:srgbClr val="FFFFFF"/>
                 </a:solidFill>
@@ -4555,8 +4734,27 @@
                 <a:ea typeface="メイリオ"/>
                 <a:cs typeface="メイリオ"/>
               </a:rPr>
-              <a:t>軽いCV</a:t>
-            </a:r>
+              <a:t>ハードルの低い</a:t>
+            </a:r>
+            <a:r>
+              <a:rPr lang="en-US" altLang="ja-JP" sz="1500" b="1" dirty="0">
+                <a:solidFill>
+                  <a:srgbClr val="FFFFFF"/>
+                </a:solidFill>
+                <a:latin typeface="メイリオ"/>
+                <a:ea typeface="メイリオ"/>
+                <a:cs typeface="メイリオ"/>
+              </a:rPr>
+              <a:t>CV</a:t>
+            </a:r>
+            <a:endParaRPr sz="1500" b="1" dirty="0">
+              <a:solidFill>
+                <a:srgbClr val="FFFFFF"/>
+              </a:solidFill>
+              <a:latin typeface="メイリオ"/>
+              <a:ea typeface="メイリオ"/>
+              <a:cs typeface="メイリオ"/>
+            </a:endParaRPr>
           </a:p>
         </p:txBody>
       </p:sp>
@@ -4599,10 +4797,11 @@
           </a:fontRef>
         </p:style>
         <p:txBody>
-          <a:bodyPr rtlCol="0" anchor="ctr" wrap="square" lIns="72000" tIns="18000" rIns="72000" bIns="18000"/>
+          <a:bodyPr wrap="square" lIns="72000" tIns="18000" rIns="72000" bIns="18000" rtlCol="0" anchor="ctr"/>
           <a:lstStyle/>
           <a:p>
             <a:pPr algn="ctr"/>
+            <a:endParaRPr/>
           </a:p>
         </p:txBody>
       </p:sp>
@@ -4623,7 +4822,7 @@
           <a:noFill/>
         </p:spPr>
         <p:txBody>
-          <a:bodyPr wrap="square" anchor="ctr" lIns="36000" rIns="36000" tIns="18000" bIns="18000">
+          <a:bodyPr wrap="square" lIns="36000" tIns="18000" rIns="36000" bIns="18000" anchor="ctr">
             <a:spAutoFit/>
           </a:bodyPr>
           <a:lstStyle/>
@@ -4710,10 +4909,11 @@
           </a:fontRef>
         </p:style>
         <p:txBody>
-          <a:bodyPr rtlCol="0" anchor="ctr" wrap="square" lIns="72000" tIns="18000" rIns="72000" bIns="18000"/>
+          <a:bodyPr wrap="square" lIns="72000" tIns="18000" rIns="72000" bIns="18000" rtlCol="0" anchor="ctr"/>
           <a:lstStyle/>
           <a:p>
             <a:pPr algn="ctr"/>
+            <a:endParaRPr/>
           </a:p>
         </p:txBody>
       </p:sp>
@@ -4734,7 +4934,7 @@
           <a:noFill/>
         </p:spPr>
         <p:txBody>
-          <a:bodyPr wrap="square" anchor="ctr" lIns="36000" rIns="36000" tIns="18000" bIns="18000">
+          <a:bodyPr wrap="square" lIns="36000" tIns="18000" rIns="36000" bIns="18000" anchor="ctr">
             <a:spAutoFit/>
           </a:bodyPr>
           <a:lstStyle/>
@@ -4821,10 +5021,11 @@
           </a:fontRef>
         </p:style>
         <p:txBody>
-          <a:bodyPr rtlCol="0" anchor="ctr" wrap="square" lIns="72000" tIns="18000" rIns="72000" bIns="18000"/>
+          <a:bodyPr wrap="square" lIns="72000" tIns="18000" rIns="72000" bIns="18000" rtlCol="0" anchor="ctr"/>
           <a:lstStyle/>
           <a:p>
             <a:pPr algn="ctr"/>
+            <a:endParaRPr/>
           </a:p>
         </p:txBody>
       </p:sp>
@@ -4845,7 +5046,7 @@
           <a:noFill/>
         </p:spPr>
         <p:txBody>
-          <a:bodyPr wrap="square" anchor="ctr" lIns="36000" rIns="36000" tIns="18000" bIns="18000">
+          <a:bodyPr wrap="square" lIns="36000" tIns="18000" rIns="36000" bIns="18000" anchor="ctr">
             <a:spAutoFit/>
           </a:bodyPr>
           <a:lstStyle/>
@@ -4932,10 +5133,11 @@
           </a:fontRef>
         </p:style>
         <p:txBody>
-          <a:bodyPr rtlCol="0" anchor="ctr" wrap="square" lIns="72000" tIns="18000" rIns="72000" bIns="18000"/>
+          <a:bodyPr wrap="square" lIns="72000" tIns="18000" rIns="72000" bIns="18000" rtlCol="0" anchor="ctr"/>
           <a:lstStyle/>
           <a:p>
             <a:pPr algn="ctr"/>
+            <a:endParaRPr/>
           </a:p>
         </p:txBody>
       </p:sp>
@@ -4947,8 +5149,8 @@
         </p:nvSpPr>
         <p:spPr>
           <a:xfrm>
-            <a:off x="9976078" y="2268000"/>
-            <a:ext cx="1237921" cy="936000"/>
+            <a:off x="9976078" y="2497764"/>
+            <a:ext cx="1237921" cy="476472"/>
           </a:xfrm>
           <a:prstGeom prst="rect">
             <a:avLst/>
@@ -4956,7 +5158,7 @@
           <a:noFill/>
         </p:spPr>
         <p:txBody>
-          <a:bodyPr wrap="square" anchor="ctr" lIns="36000" rIns="36000" tIns="18000" bIns="18000">
+          <a:bodyPr wrap="square" lIns="36000" tIns="18000" rIns="36000" bIns="18000" anchor="ctr">
             <a:spAutoFit/>
           </a:bodyPr>
           <a:lstStyle/>
@@ -4970,7 +5172,7 @@
               </a:spcAft>
             </a:pPr>
             <a:r>
-              <a:rPr sz="1300" b="1">
+              <a:rPr lang="ja-JP" altLang="en-US" sz="1300" b="1" dirty="0">
                 <a:solidFill>
                   <a:srgbClr val="FFFFFF"/>
                 </a:solidFill>
@@ -4978,8 +5180,27 @@
                 <a:ea typeface="メイリオ"/>
                 <a:cs typeface="メイリオ"/>
               </a:rPr>
-              <a:t>本CV</a:t>
-            </a:r>
+              <a:t>売上につながる</a:t>
+            </a:r>
+            <a:r>
+              <a:rPr lang="en-US" altLang="ja-JP" sz="1300" b="1" dirty="0">
+                <a:solidFill>
+                  <a:srgbClr val="FFFFFF"/>
+                </a:solidFill>
+                <a:latin typeface="メイリオ"/>
+                <a:ea typeface="メイリオ"/>
+                <a:cs typeface="メイリオ"/>
+              </a:rPr>
+              <a:t>CV</a:t>
+            </a:r>
+            <a:endParaRPr sz="1300" b="1" dirty="0">
+              <a:solidFill>
+                <a:srgbClr val="FFFFFF"/>
+              </a:solidFill>
+              <a:latin typeface="メイリオ"/>
+              <a:ea typeface="メイリオ"/>
+              <a:cs typeface="メイリオ"/>
+            </a:endParaRPr>
           </a:p>
         </p:txBody>
       </p:sp>
@@ -5020,10 +5241,11 @@
           </a:fontRef>
         </p:style>
         <p:txBody>
-          <a:bodyPr rtlCol="0" anchor="ctr" wrap="square" lIns="72000" tIns="18000" rIns="72000" bIns="18000"/>
+          <a:bodyPr wrap="square" lIns="72000" tIns="18000" rIns="72000" bIns="18000" rtlCol="0" anchor="ctr"/>
           <a:lstStyle/>
           <a:p>
             <a:pPr algn="ctr"/>
+            <a:endParaRPr/>
           </a:p>
         </p:txBody>
       </p:sp>
@@ -5044,7 +5266,7 @@
           <a:noFill/>
         </p:spPr>
         <p:txBody>
-          <a:bodyPr wrap="square" anchor="ctr" lIns="36000" rIns="36000" tIns="18000" bIns="18000">
+          <a:bodyPr wrap="square" lIns="36000" tIns="18000" rIns="36000" bIns="18000" anchor="ctr">
             <a:spAutoFit/>
           </a:bodyPr>
           <a:lstStyle/>
@@ -5108,10 +5330,11 @@
           </a:fontRef>
         </p:style>
         <p:txBody>
-          <a:bodyPr rtlCol="0" anchor="ctr" wrap="square" lIns="72000" tIns="18000" rIns="72000" bIns="18000"/>
+          <a:bodyPr wrap="square" lIns="72000" tIns="18000" rIns="72000" bIns="18000" rtlCol="0" anchor="ctr"/>
           <a:lstStyle/>
           <a:p>
             <a:pPr algn="ctr"/>
+            <a:endParaRPr/>
           </a:p>
         </p:txBody>
       </p:sp>
@@ -5132,7 +5355,7 @@
           <a:noFill/>
         </p:spPr>
         <p:txBody>
-          <a:bodyPr wrap="square" anchor="ctr" lIns="36000" rIns="36000" tIns="18000" bIns="18000">
+          <a:bodyPr wrap="square" lIns="36000" tIns="18000" rIns="36000" bIns="18000" anchor="ctr">
             <a:spAutoFit/>
           </a:bodyPr>
           <a:lstStyle/>
@@ -5236,7 +5459,7 @@
           </a:fontRef>
         </p:style>
         <p:txBody>
-          <a:bodyPr rtlCol="0" anchor="ctr" wrap="square" lIns="18000" tIns="0" rIns="18000" bIns="0"/>
+          <a:bodyPr wrap="square" lIns="18000" tIns="0" rIns="18000" bIns="0" rtlCol="0" anchor="ctr"/>
           <a:lstStyle/>
           <a:p>
             <a:pPr algn="ctr">
@@ -5302,7 +5525,7 @@
           </a:fontRef>
         </p:style>
         <p:txBody>
-          <a:bodyPr rtlCol="0" anchor="ctr" wrap="square" lIns="18000" tIns="0" rIns="18000" bIns="0"/>
+          <a:bodyPr wrap="square" lIns="18000" tIns="0" rIns="18000" bIns="0" rtlCol="0" anchor="ctr"/>
           <a:lstStyle/>
           <a:p>
             <a:pPr algn="ctr">
@@ -5368,7 +5591,7 @@
           </a:fontRef>
         </p:style>
         <p:txBody>
-          <a:bodyPr rtlCol="0" anchor="ctr" wrap="square" lIns="18000" tIns="0" rIns="18000" bIns="0"/>
+          <a:bodyPr wrap="square" lIns="18000" tIns="0" rIns="18000" bIns="0" rtlCol="0" anchor="ctr"/>
           <a:lstStyle/>
           <a:p>
             <a:pPr algn="ctr">
@@ -5434,7 +5657,7 @@
           </a:fontRef>
         </p:style>
         <p:txBody>
-          <a:bodyPr rtlCol="0" anchor="ctr" wrap="square" lIns="18000" tIns="0" rIns="18000" bIns="0"/>
+          <a:bodyPr wrap="square" lIns="18000" tIns="0" rIns="18000" bIns="0" rtlCol="0" anchor="ctr"/>
           <a:lstStyle/>
           <a:p>
             <a:pPr algn="ctr">
@@ -5500,7 +5723,7 @@
           </a:fontRef>
         </p:style>
         <p:txBody>
-          <a:bodyPr rtlCol="0" anchor="ctr" wrap="square" lIns="18000" tIns="0" rIns="18000" bIns="0"/>
+          <a:bodyPr wrap="square" lIns="18000" tIns="0" rIns="18000" bIns="0" rtlCol="0" anchor="ctr"/>
           <a:lstStyle/>
           <a:p>
             <a:pPr algn="ctr">
@@ -5566,7 +5789,7 @@
           </a:fontRef>
         </p:style>
         <p:txBody>
-          <a:bodyPr rtlCol="0" anchor="ctr" wrap="square" lIns="18000" tIns="0" rIns="18000" bIns="0"/>
+          <a:bodyPr wrap="square" lIns="18000" tIns="0" rIns="18000" bIns="0" rtlCol="0" anchor="ctr"/>
           <a:lstStyle/>
           <a:p>
             <a:pPr algn="ctr">
@@ -5632,7 +5855,7 @@
           </a:fontRef>
         </p:style>
         <p:txBody>
-          <a:bodyPr rtlCol="0" anchor="ctr" wrap="square" lIns="18000" tIns="0" rIns="18000" bIns="0"/>
+          <a:bodyPr wrap="square" lIns="18000" tIns="0" rIns="18000" bIns="0" rtlCol="0" anchor="ctr"/>
           <a:lstStyle/>
           <a:p>
             <a:pPr algn="ctr">
@@ -5674,7 +5897,7 @@
           <a:noFill/>
         </p:spPr>
         <p:txBody>
-          <a:bodyPr wrap="square" anchor="t" lIns="36000" rIns="36000" tIns="18000" bIns="18000">
+          <a:bodyPr wrap="square" lIns="36000" tIns="18000" rIns="36000" bIns="18000" anchor="t">
             <a:spAutoFit/>
           </a:bodyPr>
           <a:lstStyle/>
@@ -5795,7 +6018,7 @@
           <a:noFill/>
         </p:spPr>
         <p:txBody>
-          <a:bodyPr wrap="square" anchor="ctr" lIns="36000" rIns="36000" tIns="18000" bIns="18000">
+          <a:bodyPr wrap="square" lIns="36000" tIns="18000" rIns="36000" bIns="18000" anchor="ctr">
             <a:spAutoFit/>
           </a:bodyPr>
           <a:lstStyle/>
@@ -5839,7 +6062,7 @@
           <a:noFill/>
         </p:spPr>
         <p:txBody>
-          <a:bodyPr wrap="square" anchor="ctr" lIns="36000" rIns="36000" tIns="18000" bIns="18000">
+          <a:bodyPr wrap="square" lIns="36000" tIns="18000" rIns="36000" bIns="18000" anchor="ctr">
             <a:spAutoFit/>
           </a:bodyPr>
           <a:lstStyle/>
@@ -5940,7 +6163,7 @@
           <a:noFill/>
         </p:spPr>
         <p:txBody>
-          <a:bodyPr wrap="square" anchor="t" lIns="36000" rIns="36000" tIns="18000" bIns="18000">
+          <a:bodyPr wrap="square" lIns="36000" tIns="18000" rIns="36000" bIns="18000" anchor="t">
             <a:spAutoFit/>
           </a:bodyPr>
           <a:lstStyle/>
@@ -5975,8 +6198,8 @@
         </p:nvSpPr>
         <p:spPr>
           <a:xfrm>
-            <a:off x="5472000" y="5004000"/>
-            <a:ext cx="2232000" cy="792000"/>
+            <a:off x="5472000" y="5089693"/>
+            <a:ext cx="2232000" cy="620614"/>
           </a:xfrm>
           <a:prstGeom prst="rect">
             <a:avLst/>
@@ -5984,7 +6207,7 @@
           <a:noFill/>
         </p:spPr>
         <p:txBody>
-          <a:bodyPr wrap="square" anchor="ctr" lIns="36000" rIns="36000" tIns="18000" bIns="18000">
+          <a:bodyPr wrap="square" lIns="36000" tIns="18000" rIns="36000" bIns="18000" anchor="ctr">
             <a:spAutoFit/>
           </a:bodyPr>
           <a:lstStyle/>
@@ -5998,7 +6221,7 @@
               </a:spcAft>
             </a:pPr>
             <a:r>
-              <a:rPr sz="1100" b="0">
+              <a:rPr lang="en-US" altLang="ja-JP" sz="1100" b="0" dirty="0" err="1">
                 <a:solidFill>
                   <a:srgbClr val="7F7F7F"/>
                 </a:solidFill>
@@ -6006,8 +6229,38 @@
                 <a:ea typeface="メイリオ"/>
                 <a:cs typeface="メイリオ"/>
               </a:rPr>
-              <a:t>誘導可能</a:t>
-            </a:r>
+              <a:t>LINE</a:t>
+            </a:r>
+            <a:r>
+              <a:rPr sz="1100" b="0" dirty="0" err="1">
+                <a:solidFill>
+                  <a:srgbClr val="7F7F7F"/>
+                </a:solidFill>
+                <a:latin typeface="メイリオ"/>
+                <a:ea typeface="メイリオ"/>
+                <a:cs typeface="メイリオ"/>
+              </a:rPr>
+              <a:t>誘導</a:t>
+            </a:r>
+            <a:r>
+              <a:rPr lang="ja-JP" altLang="en-US" sz="1100" b="0" dirty="0">
+                <a:solidFill>
+                  <a:srgbClr val="7F7F7F"/>
+                </a:solidFill>
+                <a:latin typeface="メイリオ"/>
+                <a:ea typeface="メイリオ"/>
+                <a:cs typeface="メイリオ"/>
+              </a:rPr>
+              <a:t>対象</a:t>
+            </a:r>
+            <a:endParaRPr sz="1100" b="0" dirty="0">
+              <a:solidFill>
+                <a:srgbClr val="7F7F7F"/>
+              </a:solidFill>
+              <a:latin typeface="メイリオ"/>
+              <a:ea typeface="メイリオ"/>
+              <a:cs typeface="メイリオ"/>
+            </a:endParaRPr>
           </a:p>
           <a:p>
             <a:pPr algn="ctr">
@@ -6019,7 +6272,7 @@
               </a:spcAft>
             </a:pPr>
             <a:r>
-              <a:rPr sz="2200" b="1">
+              <a:rPr sz="2200" b="1" dirty="0">
                 <a:solidFill>
                   <a:srgbClr val="1F285A"/>
                 </a:solidFill>
@@ -6085,7 +6338,7 @@
           <a:noFill/>
         </p:spPr>
         <p:txBody>
-          <a:bodyPr wrap="square" anchor="t" lIns="36000" rIns="36000" tIns="18000" bIns="18000">
+          <a:bodyPr wrap="square" lIns="36000" tIns="18000" rIns="36000" bIns="18000" anchor="t">
             <a:spAutoFit/>
           </a:bodyPr>
           <a:lstStyle/>
@@ -6129,7 +6382,7 @@
           <a:noFill/>
         </p:spPr>
         <p:txBody>
-          <a:bodyPr wrap="square" anchor="ctr" lIns="36000" rIns="36000" tIns="18000" bIns="18000">
+          <a:bodyPr wrap="square" lIns="36000" tIns="18000" rIns="36000" bIns="18000" anchor="ctr">
             <a:spAutoFit/>
           </a:bodyPr>
           <a:lstStyle/>
@@ -6194,7 +6447,7 @@
           <a:noFill/>
         </p:spPr>
         <p:txBody>
-          <a:bodyPr wrap="square" anchor="t" lIns="36000" rIns="36000" tIns="18000" bIns="18000">
+          <a:bodyPr wrap="square" lIns="36000" tIns="18000" rIns="36000" bIns="18000" anchor="t">
             <a:spAutoFit/>
           </a:bodyPr>
           <a:lstStyle/>
@@ -6254,8 +6507,8 @@
         </p:nvSpPr>
         <p:spPr>
           <a:xfrm>
-            <a:off x="547200" y="136800"/>
-            <a:ext cx="11070119" cy="338400"/>
+            <a:off x="547200" y="161078"/>
+            <a:ext cx="11070119" cy="289843"/>
           </a:xfrm>
           <a:prstGeom prst="rect">
             <a:avLst/>
@@ -6270,7 +6523,7 @@
           <a:p>
             <a:pPr algn="l"/>
             <a:r>
-              <a:rPr sz="1600" b="1">
+              <a:rPr sz="1600" b="1" dirty="0" err="1">
                 <a:solidFill>
                   <a:srgbClr val="002060"/>
                 </a:solidFill>
@@ -6278,8 +6531,16 @@
                 <a:ea typeface="メイリオ"/>
                 <a:cs typeface="メイリオ"/>
               </a:rPr>
-              <a:t>広告で獲得した反響を、売上につなげ切る</a:t>
-            </a:r>
+              <a:t>広告で獲得した反響を、売上につなげる</a:t>
+            </a:r>
+            <a:endParaRPr sz="1600" b="1" dirty="0">
+              <a:solidFill>
+                <a:srgbClr val="002060"/>
+              </a:solidFill>
+              <a:latin typeface="メイリオ"/>
+              <a:ea typeface="メイリオ"/>
+              <a:cs typeface="メイリオ"/>
+            </a:endParaRPr>
           </a:p>
         </p:txBody>
       </p:sp>
@@ -6384,7 +6645,7 @@
           <a:noFill/>
         </p:spPr>
         <p:txBody>
-          <a:bodyPr wrap="square" anchor="ctr" lIns="36000" rIns="36000" tIns="18000" bIns="18000">
+          <a:bodyPr wrap="square" lIns="36000" tIns="18000" rIns="36000" bIns="18000" anchor="ctr">
             <a:spAutoFit/>
           </a:bodyPr>
           <a:lstStyle/>
@@ -6471,10 +6732,11 @@
           </a:fontRef>
         </p:style>
         <p:txBody>
-          <a:bodyPr rtlCol="0" anchor="ctr" wrap="square" lIns="72000" tIns="18000" rIns="72000" bIns="18000"/>
+          <a:bodyPr wrap="square" lIns="72000" tIns="18000" rIns="72000" bIns="18000" rtlCol="0" anchor="ctr"/>
           <a:lstStyle/>
           <a:p>
             <a:pPr algn="ctr"/>
+            <a:endParaRPr/>
           </a:p>
         </p:txBody>
       </p:sp>
@@ -6495,7 +6757,7 @@
           <a:noFill/>
         </p:spPr>
         <p:txBody>
-          <a:bodyPr wrap="square" anchor="ctr" lIns="36000" rIns="36000" tIns="18000" bIns="18000">
+          <a:bodyPr wrap="square" lIns="36000" tIns="18000" rIns="36000" bIns="18000" anchor="ctr">
             <a:spAutoFit/>
           </a:bodyPr>
           <a:lstStyle/>
@@ -6561,10 +6823,11 @@
           </a:fontRef>
         </p:style>
         <p:txBody>
-          <a:bodyPr rtlCol="0" anchor="ctr" wrap="square" lIns="72000" tIns="18000" rIns="72000" bIns="18000"/>
+          <a:bodyPr wrap="square" lIns="72000" tIns="18000" rIns="72000" bIns="18000" rtlCol="0" anchor="ctr"/>
           <a:lstStyle/>
           <a:p>
             <a:pPr algn="ctr"/>
+            <a:endParaRPr/>
           </a:p>
         </p:txBody>
       </p:sp>
@@ -6585,7 +6848,7 @@
           <a:noFill/>
         </p:spPr>
         <p:txBody>
-          <a:bodyPr wrap="square" anchor="ctr" lIns="36000" rIns="36000" tIns="18000" bIns="18000">
+          <a:bodyPr wrap="square" lIns="36000" tIns="18000" rIns="36000" bIns="18000" anchor="ctr">
             <a:spAutoFit/>
           </a:bodyPr>
           <a:lstStyle/>
@@ -6651,10 +6914,11 @@
           </a:fontRef>
         </p:style>
         <p:txBody>
-          <a:bodyPr rtlCol="0" anchor="ctr" wrap="square" lIns="72000" tIns="18000" rIns="72000" bIns="18000"/>
+          <a:bodyPr wrap="square" lIns="72000" tIns="18000" rIns="72000" bIns="18000" rtlCol="0" anchor="ctr"/>
           <a:lstStyle/>
           <a:p>
             <a:pPr algn="ctr"/>
+            <a:endParaRPr/>
           </a:p>
         </p:txBody>
       </p:sp>
@@ -6675,7 +6939,7 @@
           <a:noFill/>
         </p:spPr>
         <p:txBody>
-          <a:bodyPr wrap="square" anchor="ctr" lIns="36000" rIns="36000" tIns="18000" bIns="18000">
+          <a:bodyPr wrap="square" lIns="36000" tIns="18000" rIns="36000" bIns="18000" anchor="ctr">
             <a:spAutoFit/>
           </a:bodyPr>
           <a:lstStyle/>
@@ -6731,8 +6995,8 @@
         </p:nvSpPr>
         <p:spPr>
           <a:xfrm>
-            <a:off x="6690568" y="1835999"/>
-            <a:ext cx="4721431" cy="251999"/>
+            <a:off x="6690568" y="1850720"/>
+            <a:ext cx="4721431" cy="222556"/>
           </a:xfrm>
           <a:prstGeom prst="rect">
             <a:avLst/>
@@ -6740,7 +7004,7 @@
           <a:noFill/>
         </p:spPr>
         <p:txBody>
-          <a:bodyPr wrap="square" anchor="ctr" lIns="36000" rIns="36000" tIns="18000" bIns="18000">
+          <a:bodyPr wrap="square" lIns="36000" tIns="18000" rIns="36000" bIns="18000" anchor="ctr">
             <a:spAutoFit/>
           </a:bodyPr>
           <a:lstStyle/>
@@ -6754,7 +7018,7 @@
               </a:spcAft>
             </a:pPr>
             <a:r>
-              <a:rPr sz="1100" b="1">
+              <a:rPr sz="1100" b="1" dirty="0" err="1">
                 <a:solidFill>
                   <a:srgbClr val="7F7F7F"/>
                 </a:solidFill>
@@ -6762,8 +7026,27 @@
                 <a:ea typeface="メイリオ"/>
                 <a:cs typeface="メイリオ"/>
               </a:rPr>
-              <a:t>CV後に取りこぼしている層</a:t>
-            </a:r>
+              <a:t>CV後</a:t>
+            </a:r>
+            <a:r>
+              <a:rPr lang="ja-JP" altLang="en-US" sz="1100" b="1" dirty="0">
+                <a:solidFill>
+                  <a:srgbClr val="7F7F7F"/>
+                </a:solidFill>
+                <a:latin typeface="メイリオ"/>
+                <a:ea typeface="メイリオ"/>
+                <a:cs typeface="メイリオ"/>
+              </a:rPr>
+              <a:t>に離脱しているユーザー</a:t>
+            </a:r>
+            <a:endParaRPr sz="1100" b="1" dirty="0">
+              <a:solidFill>
+                <a:srgbClr val="7F7F7F"/>
+              </a:solidFill>
+              <a:latin typeface="メイリオ"/>
+              <a:ea typeface="メイリオ"/>
+              <a:cs typeface="メイリオ"/>
+            </a:endParaRPr>
           </a:p>
         </p:txBody>
       </p:sp>
@@ -6804,10 +7087,11 @@
           </a:fontRef>
         </p:style>
         <p:txBody>
-          <a:bodyPr rtlCol="0" anchor="ctr" wrap="square" lIns="72000" tIns="18000" rIns="72000" bIns="18000"/>
+          <a:bodyPr wrap="square" lIns="72000" tIns="18000" rIns="72000" bIns="18000" rtlCol="0" anchor="ctr"/>
           <a:lstStyle/>
           <a:p>
             <a:pPr algn="ctr"/>
+            <a:endParaRPr/>
           </a:p>
         </p:txBody>
       </p:sp>
@@ -6828,7 +7112,7 @@
           <a:noFill/>
         </p:spPr>
         <p:txBody>
-          <a:bodyPr wrap="square" anchor="ctr" lIns="36000" rIns="36000" tIns="18000" bIns="18000">
+          <a:bodyPr wrap="square" lIns="36000" tIns="18000" rIns="36000" bIns="18000" anchor="ctr">
             <a:spAutoFit/>
           </a:bodyPr>
           <a:lstStyle/>
@@ -6892,10 +7176,11 @@
           </a:fontRef>
         </p:style>
         <p:txBody>
-          <a:bodyPr rtlCol="0" anchor="ctr" wrap="square" lIns="72000" tIns="18000" rIns="72000" bIns="18000"/>
+          <a:bodyPr wrap="square" lIns="72000" tIns="18000" rIns="72000" bIns="18000" rtlCol="0" anchor="ctr"/>
           <a:lstStyle/>
           <a:p>
             <a:pPr algn="ctr"/>
+            <a:endParaRPr/>
           </a:p>
         </p:txBody>
       </p:sp>
@@ -6916,7 +7201,7 @@
           <a:noFill/>
         </p:spPr>
         <p:txBody>
-          <a:bodyPr wrap="square" anchor="ctr" lIns="36000" rIns="36000" tIns="18000" bIns="18000">
+          <a:bodyPr wrap="square" lIns="36000" tIns="18000" rIns="36000" bIns="18000" anchor="ctr">
             <a:spAutoFit/>
           </a:bodyPr>
           <a:lstStyle/>
@@ -6980,10 +7265,11 @@
           </a:fontRef>
         </p:style>
         <p:txBody>
-          <a:bodyPr rtlCol="0" anchor="ctr" wrap="square" lIns="72000" tIns="18000" rIns="72000" bIns="18000"/>
+          <a:bodyPr wrap="square" lIns="72000" tIns="18000" rIns="72000" bIns="18000" rtlCol="0" anchor="ctr"/>
           <a:lstStyle/>
           <a:p>
             <a:pPr algn="ctr"/>
+            <a:endParaRPr/>
           </a:p>
         </p:txBody>
       </p:sp>
@@ -7004,7 +7290,7 @@
           <a:noFill/>
         </p:spPr>
         <p:txBody>
-          <a:bodyPr wrap="square" anchor="ctr" lIns="36000" rIns="36000" tIns="18000" bIns="18000">
+          <a:bodyPr wrap="square" lIns="36000" tIns="18000" rIns="36000" bIns="18000" anchor="ctr">
             <a:spAutoFit/>
           </a:bodyPr>
           <a:lstStyle/>
@@ -7068,10 +7354,11 @@
           </a:fontRef>
         </p:style>
         <p:txBody>
-          <a:bodyPr rtlCol="0" anchor="ctr" wrap="square" lIns="72000" tIns="18000" rIns="72000" bIns="18000"/>
+          <a:bodyPr wrap="square" lIns="72000" tIns="18000" rIns="72000" bIns="18000" rtlCol="0" anchor="ctr"/>
           <a:lstStyle/>
           <a:p>
             <a:pPr algn="ctr"/>
+            <a:endParaRPr/>
           </a:p>
         </p:txBody>
       </p:sp>
@@ -7092,7 +7379,7 @@
           <a:noFill/>
         </p:spPr>
         <p:txBody>
-          <a:bodyPr wrap="square" anchor="ctr" lIns="36000" rIns="36000" tIns="18000" bIns="18000">
+          <a:bodyPr wrap="square" lIns="36000" tIns="18000" rIns="36000" bIns="18000" anchor="ctr">
             <a:spAutoFit/>
           </a:bodyPr>
           <a:lstStyle/>
@@ -7171,7 +7458,7 @@
           <a:noFill/>
         </p:spPr>
         <p:txBody>
-          <a:bodyPr wrap="square" anchor="ctr" lIns="36000" rIns="36000" tIns="18000" bIns="18000">
+          <a:bodyPr wrap="square" lIns="36000" tIns="18000" rIns="36000" bIns="18000" anchor="ctr">
             <a:spAutoFit/>
           </a:bodyPr>
           <a:lstStyle/>
@@ -7258,10 +7545,11 @@
           </a:fontRef>
         </p:style>
         <p:txBody>
-          <a:bodyPr rtlCol="0" anchor="ctr" wrap="square" lIns="72000" tIns="18000" rIns="72000" bIns="18000"/>
+          <a:bodyPr wrap="square" lIns="72000" tIns="18000" rIns="72000" bIns="18000" rtlCol="0" anchor="ctr"/>
           <a:lstStyle/>
           <a:p>
             <a:pPr algn="ctr"/>
+            <a:endParaRPr/>
           </a:p>
         </p:txBody>
       </p:sp>
@@ -7282,7 +7570,7 @@
           <a:noFill/>
         </p:spPr>
         <p:txBody>
-          <a:bodyPr wrap="square" anchor="ctr" lIns="36000" rIns="36000" tIns="18000" bIns="18000">
+          <a:bodyPr wrap="square" lIns="36000" tIns="18000" rIns="36000" bIns="18000" anchor="ctr">
             <a:spAutoFit/>
           </a:bodyPr>
           <a:lstStyle/>
@@ -7348,10 +7636,11 @@
           </a:fontRef>
         </p:style>
         <p:txBody>
-          <a:bodyPr rtlCol="0" anchor="ctr" wrap="square" lIns="72000" tIns="18000" rIns="72000" bIns="18000"/>
+          <a:bodyPr wrap="square" lIns="72000" tIns="18000" rIns="72000" bIns="18000" rtlCol="0" anchor="ctr"/>
           <a:lstStyle/>
           <a:p>
             <a:pPr algn="ctr"/>
+            <a:endParaRPr/>
           </a:p>
         </p:txBody>
       </p:sp>
@@ -7372,7 +7661,7 @@
           <a:noFill/>
         </p:spPr>
         <p:txBody>
-          <a:bodyPr wrap="square" anchor="ctr" lIns="36000" rIns="36000" tIns="18000" bIns="18000">
+          <a:bodyPr wrap="square" lIns="36000" tIns="18000" rIns="36000" bIns="18000" anchor="ctr">
             <a:spAutoFit/>
           </a:bodyPr>
           <a:lstStyle/>
@@ -7438,10 +7727,11 @@
           </a:fontRef>
         </p:style>
         <p:txBody>
-          <a:bodyPr rtlCol="0" anchor="ctr" wrap="square" lIns="72000" tIns="18000" rIns="72000" bIns="18000"/>
+          <a:bodyPr wrap="square" lIns="72000" tIns="18000" rIns="72000" bIns="18000" rtlCol="0" anchor="ctr"/>
           <a:lstStyle/>
           <a:p>
             <a:pPr algn="ctr"/>
+            <a:endParaRPr/>
           </a:p>
         </p:txBody>
       </p:sp>
@@ -7462,7 +7752,7 @@
           <a:noFill/>
         </p:spPr>
         <p:txBody>
-          <a:bodyPr wrap="square" anchor="ctr" lIns="36000" rIns="36000" tIns="18000" bIns="18000">
+          <a:bodyPr wrap="square" lIns="36000" tIns="18000" rIns="36000" bIns="18000" anchor="ctr">
             <a:spAutoFit/>
           </a:bodyPr>
           <a:lstStyle/>
@@ -7549,10 +7839,11 @@
           </a:fontRef>
         </p:style>
         <p:txBody>
-          <a:bodyPr rtlCol="0" anchor="ctr" wrap="square" lIns="72000" tIns="18000" rIns="72000" bIns="18000"/>
+          <a:bodyPr wrap="square" lIns="72000" tIns="18000" rIns="72000" bIns="18000" rtlCol="0" anchor="ctr"/>
           <a:lstStyle/>
           <a:p>
             <a:pPr algn="ctr"/>
+            <a:endParaRPr/>
           </a:p>
         </p:txBody>
       </p:sp>
@@ -7573,7 +7864,7 @@
           <a:noFill/>
         </p:spPr>
         <p:txBody>
-          <a:bodyPr wrap="square" anchor="ctr" lIns="36000" rIns="36000" tIns="18000" bIns="18000">
+          <a:bodyPr wrap="square" lIns="36000" tIns="18000" rIns="36000" bIns="18000" anchor="ctr">
             <a:spAutoFit/>
           </a:bodyPr>
           <a:lstStyle/>
@@ -7660,10 +7951,11 @@
           </a:fontRef>
         </p:style>
         <p:txBody>
-          <a:bodyPr rtlCol="0" anchor="ctr" wrap="square" lIns="72000" tIns="18000" rIns="72000" bIns="18000"/>
+          <a:bodyPr wrap="square" lIns="72000" tIns="18000" rIns="72000" bIns="18000" rtlCol="0" anchor="ctr"/>
           <a:lstStyle/>
           <a:p>
             <a:pPr algn="ctr"/>
+            <a:endParaRPr/>
           </a:p>
         </p:txBody>
       </p:sp>
@@ -7675,8 +7967,8 @@
         </p:nvSpPr>
         <p:spPr>
           <a:xfrm>
-            <a:off x="8092086" y="3600000"/>
-            <a:ext cx="1612396" cy="936000"/>
+            <a:off x="8092086" y="3751665"/>
+            <a:ext cx="1612396" cy="632669"/>
           </a:xfrm>
           <a:prstGeom prst="rect">
             <a:avLst/>
@@ -7684,21 +7976,21 @@
           <a:noFill/>
         </p:spPr>
         <p:txBody>
-          <a:bodyPr wrap="square" anchor="ctr" lIns="36000" rIns="36000" tIns="18000" bIns="18000">
+          <a:bodyPr wrap="square" lIns="36000" tIns="18000" rIns="36000" bIns="18000" anchor="ctr">
             <a:spAutoFit/>
           </a:bodyPr>
           <a:lstStyle/>
           <a:p>
             <a:pPr algn="ctr">
               <a:lnSpc>
-                <a:spcPct val="110000"/>
+                <a:spcPct val="100000"/>
               </a:lnSpc>
               <a:spcAft>
                 <a:spcPts val="0"/>
               </a:spcAft>
             </a:pPr>
             <a:r>
-              <a:rPr sz="1250" b="1">
+              <a:rPr lang="ja-JP" altLang="en-US" sz="1250" b="1" dirty="0">
                 <a:solidFill>
                   <a:srgbClr val="1F285A"/>
                 </a:solidFill>
@@ -7706,8 +7998,48 @@
                 <a:ea typeface="メイリオ"/>
                 <a:cs typeface="メイリオ"/>
               </a:rPr>
-              <a:t>本CV／再購入</a:t>
-            </a:r>
+              <a:t>売上につながる</a:t>
+            </a:r>
+            <a:r>
+              <a:rPr lang="en-US" altLang="ja-JP" sz="1250" b="1" dirty="0">
+                <a:solidFill>
+                  <a:srgbClr val="1F285A"/>
+                </a:solidFill>
+                <a:latin typeface="メイリオ"/>
+                <a:ea typeface="メイリオ"/>
+                <a:cs typeface="メイリオ"/>
+              </a:rPr>
+              <a:t>CV</a:t>
+            </a:r>
+            <a:br>
+              <a:rPr lang="en-US" altLang="ja-JP" sz="1250" b="1" dirty="0">
+                <a:solidFill>
+                  <a:srgbClr val="1F285A"/>
+                </a:solidFill>
+                <a:latin typeface="メイリオ"/>
+                <a:ea typeface="メイリオ"/>
+                <a:cs typeface="メイリオ"/>
+              </a:rPr>
+            </a:br>
+            <a:r>
+              <a:rPr sz="1250" b="1" dirty="0" err="1">
+                <a:solidFill>
+                  <a:srgbClr val="1F285A"/>
+                </a:solidFill>
+                <a:latin typeface="メイリオ"/>
+                <a:ea typeface="メイリオ"/>
+                <a:cs typeface="メイリオ"/>
+              </a:rPr>
+              <a:t>再購入</a:t>
+            </a:r>
+            <a:endParaRPr sz="1250" b="1" dirty="0">
+              <a:solidFill>
+                <a:srgbClr val="1F285A"/>
+              </a:solidFill>
+              <a:latin typeface="メイリオ"/>
+              <a:ea typeface="メイリオ"/>
+              <a:cs typeface="メイリオ"/>
+            </a:endParaRPr>
           </a:p>
           <a:p>
             <a:pPr algn="ctr">
@@ -7719,7 +8051,7 @@
               </a:spcAft>
             </a:pPr>
             <a:r>
-              <a:rPr sz="1250" b="1">
+              <a:rPr sz="1250" b="1" dirty="0" err="1">
                 <a:solidFill>
                   <a:srgbClr val="1F285A"/>
                 </a:solidFill>
@@ -7727,8 +8059,16 @@
                 <a:ea typeface="メイリオ"/>
                 <a:cs typeface="メイリオ"/>
               </a:rPr>
-              <a:t>／継続利用</a:t>
-            </a:r>
+              <a:t>継続利用</a:t>
+            </a:r>
+            <a:endParaRPr sz="1250" b="1" dirty="0">
+              <a:solidFill>
+                <a:srgbClr val="1F285A"/>
+              </a:solidFill>
+              <a:latin typeface="メイリオ"/>
+              <a:ea typeface="メイリオ"/>
+              <a:cs typeface="メイリオ"/>
+            </a:endParaRPr>
           </a:p>
         </p:txBody>
       </p:sp>
@@ -7771,10 +8111,11 @@
           </a:fontRef>
         </p:style>
         <p:txBody>
-          <a:bodyPr rtlCol="0" anchor="ctr" wrap="square" lIns="72000" tIns="18000" rIns="72000" bIns="18000"/>
+          <a:bodyPr wrap="square" lIns="72000" tIns="18000" rIns="72000" bIns="18000" rtlCol="0" anchor="ctr"/>
           <a:lstStyle/>
           <a:p>
             <a:pPr algn="ctr"/>
+            <a:endParaRPr/>
           </a:p>
         </p:txBody>
       </p:sp>
@@ -7795,7 +8136,7 @@
           <a:noFill/>
         </p:spPr>
         <p:txBody>
-          <a:bodyPr wrap="square" anchor="ctr" lIns="36000" rIns="36000" tIns="18000" bIns="18000">
+          <a:bodyPr wrap="square" lIns="36000" tIns="18000" rIns="36000" bIns="18000" anchor="ctr">
             <a:spAutoFit/>
           </a:bodyPr>
           <a:lstStyle/>
@@ -7859,10 +8200,11 @@
           </a:fontRef>
         </p:style>
         <p:txBody>
-          <a:bodyPr rtlCol="0" anchor="ctr" wrap="square" lIns="72000" tIns="18000" rIns="72000" bIns="18000"/>
+          <a:bodyPr wrap="square" lIns="72000" tIns="18000" rIns="72000" bIns="18000" rtlCol="0" anchor="ctr"/>
           <a:lstStyle/>
           <a:p>
             <a:pPr algn="ctr"/>
+            <a:endParaRPr/>
           </a:p>
         </p:txBody>
       </p:sp>
@@ -7883,7 +8225,7 @@
           <a:noFill/>
         </p:spPr>
         <p:txBody>
-          <a:bodyPr wrap="square" anchor="t" lIns="36000" rIns="36000" tIns="18000" bIns="18000">
+          <a:bodyPr wrap="square" lIns="36000" tIns="18000" rIns="36000" bIns="18000" anchor="t">
             <a:spAutoFit/>
           </a:bodyPr>
           <a:lstStyle/>
@@ -7918,8 +8260,8 @@
         </p:nvSpPr>
         <p:spPr>
           <a:xfrm>
-            <a:off x="792000" y="5508000"/>
-            <a:ext cx="10620000" cy="468000"/>
+            <a:off x="792000" y="5593019"/>
+            <a:ext cx="10620000" cy="297962"/>
           </a:xfrm>
           <a:prstGeom prst="rect">
             <a:avLst/>
@@ -7927,21 +8269,21 @@
           <a:noFill/>
         </p:spPr>
         <p:txBody>
-          <a:bodyPr wrap="square" anchor="ctr" lIns="36000" rIns="36000" tIns="18000" bIns="18000">
+          <a:bodyPr wrap="square" lIns="36000" tIns="18000" rIns="36000" bIns="18000" anchor="ctr">
             <a:spAutoFit/>
           </a:bodyPr>
           <a:lstStyle/>
           <a:p>
             <a:pPr algn="ctr">
               <a:lnSpc>
-                <a:spcPct val="110000"/>
+                <a:spcPct val="100000"/>
               </a:lnSpc>
               <a:spcAft>
                 <a:spcPts val="0"/>
               </a:spcAft>
             </a:pPr>
             <a:r>
-              <a:rPr sz="1700" b="1">
+              <a:rPr lang="ja-JP" altLang="en-US" sz="1700" b="1" dirty="0">
                 <a:solidFill>
                   <a:srgbClr val="1F285A"/>
                 </a:solidFill>
@@ -7949,8 +8291,60 @@
                 <a:ea typeface="メイリオ"/>
                 <a:cs typeface="メイリオ"/>
               </a:rPr>
-              <a:t>広告で獲得した反響をLINEに残し、CV後の取りこぼしを減らして売上・LTVにつなげる</a:t>
-            </a:r>
+              <a:t>広告で獲得したユーザーとの接点を</a:t>
+            </a:r>
+            <a:r>
+              <a:rPr lang="en-US" altLang="ja-JP" sz="1700" b="1" dirty="0">
+                <a:solidFill>
+                  <a:srgbClr val="1F285A"/>
+                </a:solidFill>
+                <a:latin typeface="メイリオ"/>
+                <a:ea typeface="メイリオ"/>
+                <a:cs typeface="メイリオ"/>
+              </a:rPr>
+              <a:t>LINE</a:t>
+            </a:r>
+            <a:r>
+              <a:rPr lang="ja-JP" altLang="en-US" sz="1700" b="1" dirty="0">
+                <a:solidFill>
+                  <a:srgbClr val="1F285A"/>
+                </a:solidFill>
+                <a:latin typeface="メイリオ"/>
+                <a:ea typeface="メイリオ"/>
+                <a:cs typeface="メイリオ"/>
+              </a:rPr>
+              <a:t>に残し</a:t>
+            </a:r>
+            <a:r>
+              <a:rPr sz="1700" b="1" dirty="0">
+                <a:solidFill>
+                  <a:srgbClr val="1F285A"/>
+                </a:solidFill>
+                <a:latin typeface="メイリオ"/>
+                <a:ea typeface="メイリオ"/>
+                <a:cs typeface="メイリオ"/>
+              </a:rPr>
+              <a:t>、</a:t>
+            </a:r>
+            <a:r>
+              <a:rPr sz="1700" b="1" dirty="0" err="1">
+                <a:solidFill>
+                  <a:srgbClr val="1F285A"/>
+                </a:solidFill>
+                <a:latin typeface="メイリオ"/>
+                <a:ea typeface="メイリオ"/>
+                <a:cs typeface="メイリオ"/>
+              </a:rPr>
+              <a:t>CV後の取りこぼしを減らして売上・LTVにつなげる</a:t>
+            </a:r>
+            <a:endParaRPr sz="1700" b="1" dirty="0">
+              <a:solidFill>
+                <a:srgbClr val="1F285A"/>
+              </a:solidFill>
+              <a:latin typeface="メイリオ"/>
+              <a:ea typeface="メイリオ"/>
+              <a:cs typeface="メイリオ"/>
+            </a:endParaRPr>
           </a:p>
         </p:txBody>
       </p:sp>
@@ -7962,7 +8356,7 @@
 </p:sld>
 </file>
 
-<file path=ppt/slides/slide5.xml><?xml version="1.0" encoding="utf-8"?>
+<file path=ppt/slides/slide4.xml><?xml version="1.0" encoding="utf-8"?>
 <p:sld xmlns:a="http://schemas.openxmlformats.org/drawingml/2006/main" xmlns:r="http://schemas.openxmlformats.org/officeDocument/2006/relationships" xmlns:p="http://schemas.openxmlformats.org/presentationml/2006/main">
   <p:cSld>
     <p:spTree>
@@ -9926,7 +10320,7 @@
 </p:sld>
 </file>
 
-<file path=ppt/slides/slide6.xml><?xml version="1.0" encoding="utf-8"?>
+<file path=ppt/slides/slide5.xml><?xml version="1.0" encoding="utf-8"?>
 <p:sld xmlns:a="http://schemas.openxmlformats.org/drawingml/2006/main" xmlns:r="http://schemas.openxmlformats.org/officeDocument/2006/relationships" xmlns:p="http://schemas.openxmlformats.org/presentationml/2006/main">
   <p:cSld>
     <p:spTree>
